--- a/scenarios/S02_process_innovation/deliverables/PI_과제보고_덱.pptx
+++ b/scenarios/S02_process_innovation/deliverables/PI_과제보고_덱.pptx
@@ -13,6 +13,12 @@
     <p:sldId id="261" r:id="rId12"/>
     <p:sldId id="262" r:id="rId13"/>
     <p:sldId id="263" r:id="rId14"/>
+    <p:sldId id="264" r:id="rId15"/>
+    <p:sldId id="265" r:id="rId16"/>
+    <p:sldId id="266" r:id="rId17"/>
+    <p:sldId id="267" r:id="rId18"/>
+    <p:sldId id="268" r:id="rId19"/>
+    <p:sldId id="269" r:id="rId20"/>
   </p:sldIdLst>
   <p:sldSz cx="9144000" cy="6858000" type="screen4x3"/>
   <p:notesSz cx="6858000" cy="9144000"/>
@@ -3145,6 +3151,466 @@
 </p:sld>
 </file>
 
+<file path=ppt/slides/slide10.xml><?xml version="1.0" encoding="utf-8"?>
+<p:sld xmlns:a="http://schemas.openxmlformats.org/drawingml/2006/main" xmlns:p="http://schemas.openxmlformats.org/presentationml/2006/main" xmlns:r="http://schemas.openxmlformats.org/officeDocument/2006/relationships">
+  <p:cSld>
+    <p:spTree>
+      <p:nvGrpSpPr>
+        <p:cNvPr id="1" name=""/>
+        <p:cNvGrpSpPr/>
+        <p:nvPr/>
+      </p:nvGrpSpPr>
+      <p:grpSpPr/>
+      <p:sp>
+        <p:nvSpPr>
+          <p:cNvPr id="2" name="Title 1"/>
+          <p:cNvSpPr>
+            <a:spLocks noGrp="1"/>
+          </p:cNvSpPr>
+          <p:nvPr>
+            <p:ph type="title"/>
+          </p:nvPr>
+        </p:nvSpPr>
+        <p:spPr/>
+        <p:txBody>
+          <a:bodyPr/>
+          <a:lstStyle/>
+          <a:p>
+            <a:r>
+              <a:t>변경 이력 — 총원가·원가추적 전환 승인 반영</a:t>
+            </a:r>
+          </a:p>
+        </p:txBody>
+      </p:sp>
+      <p:sp>
+        <p:nvSpPr>
+          <p:cNvPr id="3" name="Content Placeholder 2"/>
+          <p:cNvSpPr>
+            <a:spLocks noGrp="1"/>
+          </p:cNvSpPr>
+          <p:nvPr>
+            <p:ph idx="1"/>
+          </p:nvPr>
+        </p:nvSpPr>
+        <p:spPr/>
+        <p:txBody>
+          <a:bodyPr/>
+          <a:lstStyle/>
+          <a:p>
+            <a:r>
+              <a:t>수작업 관리연결결산을 폐지하고 삼성방식 총원가 기반 표준 원가관리 프로세스로 전환</a:t>
+            </a:r>
+          </a:p>
+          <a:p>
+            <a:pPr>
+              <a:defRPr sz="1400"/>
+            </a:pPr>
+            <a:r>
+              <a:t>원가추적번호를 전 법인 물동·직접원가·간접비·법인간 비용과 연계하고 검증·변경 통제 적용</a:t>
+            </a:r>
+          </a:p>
+          <a:p>
+            <a:pPr>
+              <a:defRPr sz="1400"/>
+            </a:pPr>
+            <a:r>
+              <a:t>간접비 배부 및 법인간 비용배분의 생성·승인·상계·정산·연결결산 반영 절차 표준화</a:t>
+            </a:r>
+          </a:p>
+          <a:p>
+            <a:pPr>
+              <a:defRPr sz="1400"/>
+            </a:pPr>
+            <a:r>
+              <a:t>실시간 원가 집계와 마감 잠금·감사로그·권한·정합성 검증 및 재처리·롤백 기준 반영</a:t>
+            </a:r>
+          </a:p>
+          <a:p>
+            <a:pPr>
+              <a:defRPr sz="1400"/>
+            </a:pPr>
+            <a:r>
+              <a:t>기존 수작업 데이터 이관과 신·구 원가 대사 테스트 추가; 산식·컴플라이언스·단계적 전환 기준은 후속 확정</a:t>
+            </a:r>
+          </a:p>
+        </p:txBody>
+      </p:sp>
+    </p:spTree>
+  </p:cSld>
+  <p:clrMapOvr>
+    <a:masterClrMapping/>
+  </p:clrMapOvr>
+</p:sld>
+</file>
+
+<file path=ppt/slides/slide11.xml><?xml version="1.0" encoding="utf-8"?>
+<p:sld xmlns:a="http://schemas.openxmlformats.org/drawingml/2006/main" xmlns:p="http://schemas.openxmlformats.org/presentationml/2006/main" xmlns:r="http://schemas.openxmlformats.org/officeDocument/2006/relationships">
+  <p:cSld>
+    <p:spTree>
+      <p:nvGrpSpPr>
+        <p:cNvPr id="1" name=""/>
+        <p:cNvGrpSpPr/>
+        <p:nvPr/>
+      </p:nvGrpSpPr>
+      <p:grpSpPr/>
+      <p:sp>
+        <p:nvSpPr>
+          <p:cNvPr id="2" name="Title 1"/>
+          <p:cNvSpPr>
+            <a:spLocks noGrp="1"/>
+          </p:cNvSpPr>
+          <p:nvPr>
+            <p:ph type="title"/>
+          </p:nvPr>
+        </p:nvSpPr>
+        <p:spPr/>
+        <p:txBody>
+          <a:bodyPr/>
+          <a:lstStyle/>
+          <a:p>
+            <a:r>
+              <a:t>변경 이력 — 총원가·원가추적 전환 승인 반영</a:t>
+            </a:r>
+          </a:p>
+        </p:txBody>
+      </p:sp>
+      <p:sp>
+        <p:nvSpPr>
+          <p:cNvPr id="3" name="Content Placeholder 2"/>
+          <p:cNvSpPr>
+            <a:spLocks noGrp="1"/>
+          </p:cNvSpPr>
+          <p:nvPr>
+            <p:ph idx="1"/>
+          </p:nvPr>
+        </p:nvSpPr>
+        <p:spPr/>
+        <p:txBody>
+          <a:bodyPr/>
+          <a:lstStyle/>
+          <a:p>
+            <a:r>
+              <a:t>수작업 관리연결결산을 폐지하고 원가추적번호 기반 실시간 총원가 관리로 전환</a:t>
+            </a:r>
+          </a:p>
+          <a:p>
+            <a:pPr>
+              <a:defRPr sz="1400"/>
+            </a:pPr>
+            <a:r>
+              <a:t>전 법인 물동 추적, 간접비 배부, 법인간 비용배분 및 연결결산 통제 설계 반영</a:t>
+            </a:r>
+          </a:p>
+          <a:p>
+            <a:pPr>
+              <a:defRPr sz="1400"/>
+            </a:pPr>
+            <a:r>
+              <a:t>데이터 이관·신구 대사·검증·재처리·롤백·마감 잠금·감사로그·권한 통제 요구사항 반영</a:t>
+            </a:r>
+          </a:p>
+          <a:p>
+            <a:pPr>
+              <a:defRPr sz="1400"/>
+            </a:pPr>
+            <a:r>
+              <a:t>공식 산식, 배부 기준, 데이터 소유권, 대사 기준 및 단계적 전환 조건은 후속 확정</a:t>
+            </a:r>
+          </a:p>
+        </p:txBody>
+      </p:sp>
+    </p:spTree>
+  </p:cSld>
+  <p:clrMapOvr>
+    <a:masterClrMapping/>
+  </p:clrMapOvr>
+</p:sld>
+</file>
+
+<file path=ppt/slides/slide12.xml><?xml version="1.0" encoding="utf-8"?>
+<p:sld xmlns:a="http://schemas.openxmlformats.org/drawingml/2006/main" xmlns:p="http://schemas.openxmlformats.org/presentationml/2006/main" xmlns:r="http://schemas.openxmlformats.org/officeDocument/2006/relationships">
+  <p:cSld>
+    <p:spTree>
+      <p:nvGrpSpPr>
+        <p:cNvPr id="1" name=""/>
+        <p:cNvGrpSpPr/>
+        <p:nvPr/>
+      </p:nvGrpSpPr>
+      <p:grpSpPr/>
+      <p:sp>
+        <p:nvSpPr>
+          <p:cNvPr id="2" name="Title 1"/>
+          <p:cNvSpPr>
+            <a:spLocks noGrp="1"/>
+          </p:cNvSpPr>
+          <p:nvPr>
+            <p:ph type="title"/>
+          </p:nvPr>
+        </p:nvSpPr>
+        <p:spPr/>
+        <p:txBody>
+          <a:bodyPr/>
+          <a:lstStyle/>
+          <a:p>
+            <a:r>
+              <a:t>변경사항 — REQ-20250308-총원가-원가추적-전환-승인-실행</a:t>
+            </a:r>
+          </a:p>
+        </p:txBody>
+      </p:sp>
+      <p:sp>
+        <p:nvSpPr>
+          <p:cNvPr id="3" name="Content Placeholder 2"/>
+          <p:cNvSpPr>
+            <a:spLocks noGrp="1"/>
+          </p:cNvSpPr>
+          <p:nvPr>
+            <p:ph idx="1"/>
+          </p:nvPr>
+        </p:nvSpPr>
+        <p:spPr/>
+        <p:txBody>
+          <a:bodyPr/>
+          <a:lstStyle/>
+          <a:p>
+            <a:r>
+              <a:t>요청자: PI팀 이과장 · 결정: 승인 페이로드에 따라 7개 영향 산출물과 Wiki를 갱신 대상으로 확정하고, 총원가 산식·배부·법인간 거래·컴플라이언스·단계적 전환 및 롤백 기준은 후속 확정 과제로 관리한다.</a:t>
+            </a:r>
+          </a:p>
+          <a:p>
+            <a:pPr>
+              <a:defRPr sz="1400"/>
+            </a:pPr>
+            <a:r>
+              <a:t>• 수작업 관리연결결산을 폐지하고 삼성방식 총원가 기반의 전사 원가관리 프로세스로 전환하는 내용을 원가관리 업무 프로세스 정의서에 반영한다.</a:t>
+            </a:r>
+          </a:p>
+          <a:p>
+            <a:pPr>
+              <a:defRPr sz="1400"/>
+            </a:pPr>
+            <a:r>
+              <a:t>• 전 법인의 물동을 원가추적번호 단위로 식별·집계·조회하도록 하고, 발번 주체·번호 체계·필수 입력·유효성 검증·중복 및 누락 검증·변경 통제를 정의한다.</a:t>
+            </a:r>
+          </a:p>
+          <a:p>
+            <a:pPr>
+              <a:defRPr sz="1400"/>
+            </a:pPr>
+            <a:r>
+              <a:t>• 직접원가·간접비·법인간 비용을 원가추적번호와 연결하여 실시간 원가를 산출하고 법인별 원가와 전사 총원가를 비교·모니터링하도록 설계한다.</a:t>
+            </a:r>
+          </a:p>
+          <a:p>
+            <a:pPr>
+              <a:defRPr sz="1400"/>
+            </a:pPr>
+            <a:r>
+              <a:t>• 간접비 배부 기준·주기·대상·예외 처리·재배부 절차와 법인간 거래의 생성·승인·상계·정산·연결결산 반영 절차를 설계한다.</a:t>
+            </a:r>
+          </a:p>
+          <a:p>
+            <a:pPr>
+              <a:defRPr sz="1400"/>
+            </a:pPr>
+            <a:r>
+              <a:t>• 원가추적번호 누락·중복, 배부 실패, 법인간 금액 불일치, 인터페이스 오류 및 권한 오류에 대한 검증·오류 처리·재처리·롤백 시나리오를 테스트에 반영한다.</a:t>
+            </a:r>
+          </a:p>
+          <a:p>
+            <a:pPr>
+              <a:defRPr sz="1400"/>
+            </a:pPr>
+            <a:r>
+              <a:t>• 기존 수작업 결산 데이터의 이관과 신·구 원가 산출 결과 대사, 마감 잠금, 감사로그, 권한 통제 및 데이터 정합성 검증을 요구사항과 테스트에 포함한다.</a:t>
+            </a:r>
+          </a:p>
+        </p:txBody>
+      </p:sp>
+    </p:spTree>
+  </p:cSld>
+  <p:clrMapOvr>
+    <a:masterClrMapping/>
+  </p:clrMapOvr>
+</p:sld>
+</file>
+
+<file path=ppt/slides/slide13.xml><?xml version="1.0" encoding="utf-8"?>
+<p:sld xmlns:a="http://schemas.openxmlformats.org/drawingml/2006/main" xmlns:p="http://schemas.openxmlformats.org/presentationml/2006/main" xmlns:r="http://schemas.openxmlformats.org/officeDocument/2006/relationships">
+  <p:cSld>
+    <p:spTree>
+      <p:nvGrpSpPr>
+        <p:cNvPr id="1" name=""/>
+        <p:cNvGrpSpPr/>
+        <p:nvPr/>
+      </p:nvGrpSpPr>
+      <p:grpSpPr/>
+      <p:sp>
+        <p:nvSpPr>
+          <p:cNvPr id="2" name="Title 1"/>
+          <p:cNvSpPr>
+            <a:spLocks noGrp="1"/>
+          </p:cNvSpPr>
+          <p:nvPr>
+            <p:ph type="title"/>
+          </p:nvPr>
+        </p:nvSpPr>
+        <p:spPr/>
+        <p:txBody>
+          <a:bodyPr/>
+          <a:lstStyle/>
+          <a:p>
+            <a:r>
+              <a:t>변경 승인 — 총원가·원가추적 전환 실행 반영</a:t>
+            </a:r>
+          </a:p>
+        </p:txBody>
+      </p:sp>
+      <p:sp>
+        <p:nvSpPr>
+          <p:cNvPr id="3" name="Content Placeholder 2"/>
+          <p:cNvSpPr>
+            <a:spLocks noGrp="1"/>
+          </p:cNvSpPr>
+          <p:nvPr>
+            <p:ph idx="1"/>
+          </p:nvPr>
+        </p:nvSpPr>
+        <p:spPr/>
+        <p:txBody>
+          <a:bodyPr/>
+          <a:lstStyle/>
+          <a:p>
+            <a:r>
+              <a:t>수작업 관리연결결산을 폐지하고 원가추적번호 기반 삼성방식 총원가 체계로 전환</a:t>
+            </a:r>
+          </a:p>
+          <a:p>
+            <a:pPr>
+              <a:defRPr sz="1400"/>
+            </a:pPr>
+            <a:r>
+              <a:t>전 법인 물동·직접원가·간접비·법인간 비용을 실시간 식별·집계·조회</a:t>
+            </a:r>
+          </a:p>
+          <a:p>
+            <a:pPr>
+              <a:defRPr sz="1400"/>
+            </a:pPr>
+            <a:r>
+              <a:t>간접비 배부, 이전가격 구간별 원가차이, 미실현이익 제거 및 연결조정 절차 반영</a:t>
+            </a:r>
+          </a:p>
+          <a:p>
+            <a:pPr>
+              <a:defRPr sz="1400"/>
+            </a:pPr>
+            <a:r>
+              <a:t>누락·중복·배부 실패·금액 불일치·인터페이스 오류 검증과 신·구 원가 대사·재처리·롤백 기준 추가</a:t>
+            </a:r>
+          </a:p>
+          <a:p>
+            <a:pPr>
+              <a:defRPr sz="1400"/>
+            </a:pPr>
+            <a:r>
+              <a:t>삼성방식 산식, 데이터 거버넌스, 컴플라이언스 및 전환·병행운영 기준은 후속 확정·검증</a:t>
+            </a:r>
+          </a:p>
+        </p:txBody>
+      </p:sp>
+    </p:spTree>
+  </p:cSld>
+  <p:clrMapOvr>
+    <a:masterClrMapping/>
+  </p:clrMapOvr>
+</p:sld>
+</file>
+
+<file path=ppt/slides/slide14.xml><?xml version="1.0" encoding="utf-8"?>
+<p:sld xmlns:a="http://schemas.openxmlformats.org/drawingml/2006/main" xmlns:p="http://schemas.openxmlformats.org/presentationml/2006/main" xmlns:r="http://schemas.openxmlformats.org/officeDocument/2006/relationships">
+  <p:cSld>
+    <p:spTree>
+      <p:nvGrpSpPr>
+        <p:cNvPr id="1" name=""/>
+        <p:cNvGrpSpPr/>
+        <p:nvPr/>
+      </p:nvGrpSpPr>
+      <p:grpSpPr/>
+      <p:sp>
+        <p:nvSpPr>
+          <p:cNvPr id="2" name="Title 1"/>
+          <p:cNvSpPr>
+            <a:spLocks noGrp="1"/>
+          </p:cNvSpPr>
+          <p:nvPr>
+            <p:ph type="title"/>
+          </p:nvPr>
+        </p:nvSpPr>
+        <p:spPr/>
+        <p:txBody>
+          <a:bodyPr/>
+          <a:lstStyle/>
+          <a:p>
+            <a:r>
+              <a:t>승인 반영 — 총원가·원가추적 전환</a:t>
+            </a:r>
+          </a:p>
+        </p:txBody>
+      </p:sp>
+      <p:sp>
+        <p:nvSpPr>
+          <p:cNvPr id="3" name="Content Placeholder 2"/>
+          <p:cNvSpPr>
+            <a:spLocks noGrp="1"/>
+          </p:cNvSpPr>
+          <p:nvPr>
+            <p:ph idx="1"/>
+          </p:nvPr>
+        </p:nvSpPr>
+        <p:spPr/>
+        <p:txBody>
+          <a:bodyPr/>
+          <a:lstStyle/>
+          <a:p>
+            <a:r>
+              <a:t>수작업 관리연결결산을 폐지하고 원가추적번호 기반 총원가 프로세스로 전환</a:t>
+            </a:r>
+          </a:p>
+          <a:p>
+            <a:pPr>
+              <a:defRPr sz="1400"/>
+            </a:pPr>
+            <a:r>
+              <a:t>전 법인 물동·직접원가·간접비·법인간 비용의 식별·집계·검증·감사통제 표준화</a:t>
+            </a:r>
+          </a:p>
+          <a:p>
+            <a:pPr>
+              <a:defRPr sz="1400"/>
+            </a:pPr>
+            <a:r>
+              <a:t>실시간 원가 모니터링, 배부·상계·정산, 데이터 이관·신구 대사 및 롤백 시나리오 반영</a:t>
+            </a:r>
+          </a:p>
+          <a:p>
+            <a:pPr>
+              <a:defRPr sz="1400"/>
+            </a:pPr>
+            <a:r>
+              <a:t>핵심 산식·컴플라이언스·책임경계·단계적 전환 기준은 후속 확정·파일럿 검증</a:t>
+            </a:r>
+          </a:p>
+        </p:txBody>
+      </p:sp>
+    </p:spTree>
+  </p:cSld>
+  <p:clrMapOvr>
+    <a:masterClrMapping/>
+  </p:clrMapOvr>
+</p:sld>
+</file>
+
 <file path=ppt/slides/slide2.xml><?xml version="1.0" encoding="utf-8"?>
 <p:sld xmlns:a="http://schemas.openxmlformats.org/drawingml/2006/main" xmlns:p="http://schemas.openxmlformats.org/presentationml/2006/main" xmlns:r="http://schemas.openxmlformats.org/officeDocument/2006/relationships">
   <p:cSld>
@@ -3638,6 +4104,98 @@
           <a:p>
             <a:r>
               <a:t>안정화 및 모니터링(1개월)</a:t>
+            </a:r>
+          </a:p>
+        </p:txBody>
+      </p:sp>
+    </p:spTree>
+  </p:cSld>
+  <p:clrMapOvr>
+    <a:masterClrMapping/>
+  </p:clrMapOvr>
+</p:sld>
+</file>
+
+<file path=ppt/slides/slide9.xml><?xml version="1.0" encoding="utf-8"?>
+<p:sld xmlns:a="http://schemas.openxmlformats.org/drawingml/2006/main" xmlns:p="http://schemas.openxmlformats.org/presentationml/2006/main" xmlns:r="http://schemas.openxmlformats.org/officeDocument/2006/relationships">
+  <p:cSld>
+    <p:spTree>
+      <p:nvGrpSpPr>
+        <p:cNvPr id="1" name=""/>
+        <p:cNvGrpSpPr/>
+        <p:nvPr/>
+      </p:nvGrpSpPr>
+      <p:grpSpPr/>
+      <p:sp>
+        <p:nvSpPr>
+          <p:cNvPr id="2" name="Title 1"/>
+          <p:cNvSpPr>
+            <a:spLocks noGrp="1"/>
+          </p:cNvSpPr>
+          <p:nvPr>
+            <p:ph type="title"/>
+          </p:nvPr>
+        </p:nvSpPr>
+        <p:spPr/>
+        <p:txBody>
+          <a:bodyPr/>
+          <a:lstStyle/>
+          <a:p>
+            <a:r>
+              <a:t>총원가·원가추적 전환 승인 변경사항</a:t>
+            </a:r>
+          </a:p>
+        </p:txBody>
+      </p:sp>
+      <p:sp>
+        <p:nvSpPr>
+          <p:cNvPr id="3" name="Content Placeholder 2"/>
+          <p:cNvSpPr>
+            <a:spLocks noGrp="1"/>
+          </p:cNvSpPr>
+          <p:nvPr>
+            <p:ph idx="1"/>
+          </p:nvPr>
+        </p:nvSpPr>
+        <p:spPr/>
+        <p:txBody>
+          <a:bodyPr/>
+          <a:lstStyle/>
+          <a:p>
+            <a:r>
+              <a:t>수작업 관리연결결산을 폐지하고 삼성방식 총원가 기반으로 전환</a:t>
+            </a:r>
+          </a:p>
+          <a:p>
+            <a:pPr>
+              <a:defRPr sz="1400"/>
+            </a:pPr>
+            <a:r>
+              <a:t>전 법인 물동·직접원가·간접비·법인간 비용을 원가추적번호로 연결해 실시간 집계</a:t>
+            </a:r>
+          </a:p>
+          <a:p>
+            <a:pPr>
+              <a:defRPr sz="1400"/>
+            </a:pPr>
+            <a:r>
+              <a:t>간접비 배부와 법인간 비용배분의 기준·승인·상계·정산 절차 표준화</a:t>
+            </a:r>
+          </a:p>
+          <a:p>
+            <a:pPr>
+              <a:defRPr sz="1400"/>
+            </a:pPr>
+            <a:r>
+              <a:t>원가 누락·중복·배부 실패·금액 불일치 검증 및 기존 데이터 이관·신구 결과 대사 반영</a:t>
+            </a:r>
+          </a:p>
+          <a:p>
+            <a:pPr>
+              <a:defRPr sz="1400"/>
+            </a:pPr>
+            <a:r>
+              <a:t>총원가 산식·통제·컴플라이언스·단계적 전환·롤백 기준은 후속 확정 과제로 관리</a:t>
             </a:r>
           </a:p>
         </p:txBody>
